--- a/skills/qingfeng-ppt/assets/轻风模板_规范版.pptx
+++ b/skills/qingfeng-ppt/assets/轻风模板_规范版.pptx
@@ -211,7 +211,7 @@
           <a:p>
             <a:fld id="{C5488D58-9FDD-4C58-9FC4-4667448151F3}" type="datetimeFigureOut">
               <a:rPr lang="zh-CN" altLang="en-US" smtClean="0"/>
-              <a:t>2026/7/31</a:t>
+              <a:t>2026/8/5</a:t>
             </a:fld>
             <a:endParaRPr lang="zh-CN" altLang="en-US"/>
           </a:p>
